--- a/Mishmer-section/2026-27/binyat-mishmar-mifgash-peticha.pptx
+++ b/Mishmer-section/2026-27/binyat-mishmar-mifgash-peticha.pptx
@@ -15,6 +15,7 @@
     <p:sldId id="263" r:id="rId9"/>
     <p:sldId id="264" r:id="rId10"/>
     <p:sldId id="265" r:id="rId11"/>
+    <p:sldId id="272" r:id="rId23"/>
     <p:sldId id="266" r:id="rId12"/>
     <p:sldId id="267" r:id="rId13"/>
     <p:sldId id="268" r:id="rId14"/>
@@ -2475,7 +2476,7 @@
                 <a:ea typeface="Cambria" pitchFamily="34" charset="-122"/>
                 <a:cs typeface="Cambria" pitchFamily="34" charset="-120"/>
               </a:rPr>
-              <a:t>קובץ העבודה של כל משמר</a:t>
+              <a:t>ניהול המשמר — המסך של כל ערב</a:t>
             </a:r>
             <a:endParaRPr lang="en-US" sz="3200" dirty="0"/>
           </a:p>
@@ -2558,7 +2559,7 @@
                 <a:ea typeface="Arial" pitchFamily="34" charset="-122"/>
                 <a:cs typeface="Arial" pitchFamily="34" charset="-120"/>
               </a:rPr>
-              <a:t>לוז משמר השבוע</a:t>
+              <a:t>מבנה הערב</a:t>
             </a:r>
             <a:endParaRPr lang="en-US" sz="1700" dirty="0"/>
           </a:p>
@@ -2575,7 +2576,7 @@
                 <a:ea typeface="Arial" pitchFamily="34" charset="-122"/>
                 <a:cs typeface="Arial" pitchFamily="34" charset="-120"/>
               </a:rPr>
-              <a:t>שעות, מה קורה, מי מוביל כל חלק</a:t>
+              <a:t>משבצות, הפסקות, חבורות — השעות נגזרות מהמשכים</a:t>
             </a:r>
             <a:endParaRPr lang="en-US" sz="1700" dirty="0"/>
           </a:p>
@@ -2658,7 +2659,7 @@
                 <a:ea typeface="Arial" pitchFamily="34" charset="-122"/>
                 <a:cs typeface="Arial" pitchFamily="34" charset="-120"/>
               </a:rPr>
-              <a:t>הצעות למרצים</a:t>
+              <a:t>מרצים</a:t>
             </a:r>
             <a:endParaRPr lang="en-US" sz="1700" dirty="0"/>
           </a:p>
@@ -2675,7 +2676,7 @@
                 <a:ea typeface="Arial" pitchFamily="34" charset="-122"/>
                 <a:cs typeface="Arial" pitchFamily="34" charset="-120"/>
               </a:rPr>
-              <a:t>סטטוס: לא פנינו ← נשלחה פנייה ← ממתין ← סגור</a:t>
+              <a:t>מועמדים לכל שיעור, סוגרים במקום, ומעלים דף מקורות</a:t>
             </a:r>
             <a:endParaRPr lang="en-US" sz="1700" dirty="0"/>
           </a:p>
@@ -2758,7 +2759,7 @@
                 <a:ea typeface="Arial" pitchFamily="34" charset="-122"/>
                 <a:cs typeface="Arial" pitchFamily="34" charset="-120"/>
               </a:rPr>
-              <a:t>הצעות לטקסטים</a:t>
+              <a:t>חבורות</a:t>
             </a:r>
             <a:endParaRPr lang="en-US" sz="1700" dirty="0"/>
           </a:p>
@@ -2775,7 +2776,7 @@
                 <a:ea typeface="Arial" pitchFamily="34" charset="-122"/>
                 <a:cs typeface="Arial" pitchFamily="34" charset="-120"/>
               </a:rPr>
-              <a:t>מקורות לשיעורים ולחבורות</a:t>
+              <a:t>מעבירים, חללים ודפי מקורות — לכל סבב בנפרד</a:t>
             </a:r>
             <a:endParaRPr lang="en-US" sz="1700" dirty="0"/>
           </a:p>
@@ -2858,7 +2859,7 @@
                 <a:ea typeface="Arial" pitchFamily="34" charset="-122"/>
                 <a:cs typeface="Arial" pitchFamily="34" charset="-120"/>
               </a:rPr>
-              <a:t>קישוט ולוגיסטיקה</a:t>
+              <a:t>לוגיסטיקה</a:t>
             </a:r>
             <a:endParaRPr lang="en-US" sz="1700" dirty="0"/>
           </a:p>
@@ -2875,7 +2876,7 @@
                 <a:ea typeface="Arial" pitchFamily="34" charset="-122"/>
                 <a:cs typeface="Arial" pitchFamily="34" charset="-120"/>
               </a:rPr>
-              <a:t>קנבה, רשימת קניות, רעיונות</a:t>
+              <a:t>כיבוד, חלוקת חללים, וההזמנה — כתמונה</a:t>
             </a:r>
             <a:endParaRPr lang="en-US" sz="1700" dirty="0"/>
           </a:p>
@@ -2975,7 +2976,7 @@
                 <a:ea typeface="Arial" pitchFamily="34" charset="-122"/>
                 <a:cs typeface="Arial" pitchFamily="34" charset="-120"/>
               </a:rPr>
-              <a:t>צ׳קליסט מסודר, מי אחראי על מה</a:t>
+              <a:t>לפי שלבים; משימות המקטע נסגרות לבד כשהעבודה נראית</a:t>
             </a:r>
             <a:endParaRPr lang="en-US" sz="1700" dirty="0"/>
           </a:p>
@@ -3041,7 +3042,7 @@
                 <a:ea typeface="Arial" pitchFamily="34" charset="-122"/>
                 <a:cs typeface="Arial" pitchFamily="34" charset="-120"/>
               </a:rPr>
-              <a:t>כל משמר מקבל קובץ כזה מראש — אתם רק ממלאים.</a:t>
+              <a:t>כל משמר כבר קיים שם — 21 הערבים, המשימות והתאריכים המומלצים. אתם רק ממלאים.</a:t>
             </a:r>
             <a:endParaRPr lang="en-US" sz="1400" dirty="0"/>
           </a:p>
@@ -3229,7 +3230,7 @@
                 <a:ea typeface="Cambria" pitchFamily="34" charset="-122"/>
                 <a:cs typeface="Cambria" pitchFamily="34" charset="-120"/>
               </a:rPr>
-              <a:t>לפני שפונים — בדקו במאגר המשותף</a:t>
+              <a:t>לפני שפונים — בדקו במאגר המרצים באפליקציה</a:t>
             </a:r>
             <a:endParaRPr lang="en-US" sz="3200" dirty="0"/>
           </a:p>
@@ -3494,7 +3495,7 @@
             <a:avLst/>
           </a:prstGeom>
           <a:solidFill>
-            <a:srgbClr val="9C7B34"/>
+            <a:srgbClr val="5E7B47"/>
           </a:solidFill>
           <a:ln/>
         </p:spPr>
@@ -3502,128 +3503,6 @@
       <p:pic>
         <p:nvPicPr>
           <p:cNvPr id="13" name="Image 2" descr="/tmp/claude-0/-home-user-Ein-Prat-work/bfe443db-e493-5438-add8-ac2e37bc83f4/scratchpad/pptx-build/icons/clockAlt.png">    </p:cNvPr>
-          <p:cNvPicPr>
-            <a:picLocks noChangeAspect="1"/>
-          </p:cNvPicPr>
-          <p:nvPr/>
-        </p:nvPicPr>
-        <p:blipFill>
-          <a:blip r:embed="rId3"/>
-          <a:stretch>
-            <a:fillRect/>
-          </a:stretch>
-        </p:blipFill>
-        <p:spPr>
-          <a:xfrm>
-            <a:off x="5869991" y="2471623"/>
-            <a:ext cx="451714" cy="451714"/>
-          </a:xfrm>
-          <a:prstGeom prst="rect">
-            <a:avLst/>
-          </a:prstGeom>
-        </p:spPr>
-      </p:pic>
-      <p:sp>
-        <p:nvSpPr>
-          <p:cNvPr id="14" name="Text 9"/>
-          <p:cNvSpPr/>
-          <p:nvPr/>
-        </p:nvSpPr>
-        <p:spPr>
-          <a:xfrm>
-            <a:off x="4907128" y="3246120"/>
-            <a:ext cx="2377440" cy="457200"/>
-          </a:xfrm>
-          <a:prstGeom prst="rect">
-            <a:avLst/>
-          </a:prstGeom>
-          <a:noFill/>
-          <a:ln/>
-        </p:spPr>
-        <p:txBody>
-          <a:bodyPr wrap="square" lIns="0" tIns="0" rIns="0" bIns="0" rtlCol="0" anchor="ctr"/>
-          <a:lstStyle/>
-          <a:p>
-            <a:pPr algn="ctr" indent="0" marL="0">
-              <a:buNone/>
-            </a:pPr>
-            <a:r>
-              <a:rPr lang="en-US" sz="1400" b="1" dirty="0">
-                <a:solidFill>
-                  <a:srgbClr val="3E3426"/>
-                </a:solidFill>
-                <a:latin typeface="Arial" pitchFamily="34" charset="0"/>
-                <a:ea typeface="Arial" pitchFamily="34" charset="-122"/>
-                <a:cs typeface="Arial" pitchFamily="34" charset="-120"/>
-              </a:rPr>
-              <a:t>ממתין לתשובה</a:t>
-            </a:r>
-            <a:endParaRPr lang="en-US" sz="1400" dirty="0"/>
-          </a:p>
-        </p:txBody>
-      </p:sp>
-      <p:sp>
-        <p:nvSpPr>
-          <p:cNvPr id="15" name="Text 10"/>
-          <p:cNvSpPr/>
-          <p:nvPr/>
-        </p:nvSpPr>
-        <p:spPr>
-          <a:xfrm>
-            <a:off x="4739564" y="2468880"/>
-            <a:ext cx="441884" cy="548640"/>
-          </a:xfrm>
-          <a:prstGeom prst="rect">
-            <a:avLst/>
-          </a:prstGeom>
-          <a:noFill/>
-          <a:ln/>
-        </p:spPr>
-        <p:txBody>
-          <a:bodyPr wrap="square" lIns="0" tIns="0" rIns="0" bIns="0" rtlCol="0" anchor="ctr"/>
-          <a:lstStyle/>
-          <a:p>
-            <a:pPr algn="ctr" indent="0" marL="0">
-              <a:buNone/>
-            </a:pPr>
-            <a:r>
-              <a:rPr lang="en-US" sz="2200" dirty="0">
-                <a:solidFill>
-                  <a:srgbClr val="E4DDCB"/>
-                </a:solidFill>
-                <a:latin typeface="Arial" pitchFamily="34" charset="0"/>
-                <a:ea typeface="Arial" pitchFamily="34" charset="-122"/>
-                <a:cs typeface="Arial" pitchFamily="34" charset="-120"/>
-              </a:rPr>
-              <a:t>←</a:t>
-            </a:r>
-            <a:endParaRPr lang="en-US" sz="2200" dirty="0"/>
-          </a:p>
-        </p:txBody>
-      </p:sp>
-      <p:sp>
-        <p:nvSpPr>
-          <p:cNvPr id="16" name="Shape 11"/>
-          <p:cNvSpPr/>
-          <p:nvPr/>
-        </p:nvSpPr>
-        <p:spPr>
-          <a:xfrm>
-            <a:off x="3390824" y="2263140"/>
-            <a:ext cx="868680" cy="868680"/>
-          </a:xfrm>
-          <a:prstGeom prst="ellipse">
-            <a:avLst/>
-          </a:prstGeom>
-          <a:solidFill>
-            <a:srgbClr val="5E7B47"/>
-          </a:solidFill>
-          <a:ln/>
-        </p:spPr>
-      </p:sp>
-      <p:pic>
-        <p:nvPicPr>
-          <p:cNvPr id="17" name="Image 3" descr="/tmp/claude-0/-home-user-Ein-Prat-work/bfe443db-e493-5438-add8-ac2e37bc83f4/scratchpad/pptx-build/icons/checkCircle.png">    </p:cNvPr>
           <p:cNvPicPr>
             <a:picLocks noChangeAspect="1"/>
           </p:cNvPicPr>
@@ -3637,7 +3516,7 @@
         </p:blipFill>
         <p:spPr>
           <a:xfrm>
-            <a:off x="3599307" y="2471623"/>
+            <a:off x="5869991" y="2471623"/>
             <a:ext cx="451714" cy="451714"/>
           </a:xfrm>
           <a:prstGeom prst="rect">
@@ -3647,13 +3526,13 @@
       </p:pic>
       <p:sp>
         <p:nvSpPr>
-          <p:cNvPr id="18" name="Text 12"/>
-          <p:cNvSpPr/>
-          <p:nvPr/>
-        </p:nvSpPr>
-        <p:spPr>
-          <a:xfrm>
-            <a:off x="2636444" y="3246120"/>
+          <p:cNvPr id="14" name="Text 9"/>
+          <p:cNvSpPr/>
+          <p:nvPr/>
+        </p:nvSpPr>
+        <p:spPr>
+          <a:xfrm>
+            <a:off x="4907128" y="3246120"/>
             <a:ext cx="2377440" cy="457200"/>
           </a:xfrm>
           <a:prstGeom prst="rect">
@@ -3686,13 +3565,13 @@
       </p:sp>
       <p:sp>
         <p:nvSpPr>
-          <p:cNvPr id="19" name="Text 13"/>
-          <p:cNvSpPr/>
-          <p:nvPr/>
-        </p:nvSpPr>
-        <p:spPr>
-          <a:xfrm>
-            <a:off x="2468880" y="2468880"/>
+          <p:cNvPr id="15" name="Text 10"/>
+          <p:cNvSpPr/>
+          <p:nvPr/>
+        </p:nvSpPr>
+        <p:spPr>
+          <a:xfrm>
+            <a:off x="4739564" y="2468880"/>
             <a:ext cx="441884" cy="548640"/>
           </a:xfrm>
           <a:prstGeom prst="rect">
@@ -3717,7 +3596,7 @@
                 <a:ea typeface="Arial" pitchFamily="34" charset="-122"/>
                 <a:cs typeface="Arial" pitchFamily="34" charset="-120"/>
               </a:rPr>
-              <a:t>←</a:t>
+              <a:t>/</a:t>
             </a:r>
             <a:endParaRPr lang="en-US" sz="2200" dirty="0"/>
           </a:p>
@@ -3725,13 +3604,13 @@
       </p:sp>
       <p:sp>
         <p:nvSpPr>
-          <p:cNvPr id="20" name="Shape 14"/>
-          <p:cNvSpPr/>
-          <p:nvPr/>
-        </p:nvSpPr>
-        <p:spPr>
-          <a:xfrm>
-            <a:off x="1120140" y="2263140"/>
+          <p:cNvPr id="16" name="Shape 11"/>
+          <p:cNvSpPr/>
+          <p:nvPr/>
+        </p:nvSpPr>
+        <p:spPr>
+          <a:xfrm>
+            <a:off x="3390824" y="2263140"/>
             <a:ext cx="868680" cy="868680"/>
           </a:xfrm>
           <a:prstGeom prst="ellipse">
@@ -3745,7 +3624,7 @@
       </p:sp>
       <p:pic>
         <p:nvPicPr>
-          <p:cNvPr id="21" name="Image 4" descr="/tmp/claude-0/-home-user-Ein-Prat-work/bfe443db-e493-5438-add8-ac2e37bc83f4/scratchpad/pptx-build/icons/xCircle.png">    </p:cNvPr>
+          <p:cNvPr id="17" name="Image 3" descr="/tmp/claude-0/-home-user-Ein-Prat-work/bfe443db-e493-5438-add8-ac2e37bc83f4/scratchpad/pptx-build/icons/checkCircle.png">    </p:cNvPr>
           <p:cNvPicPr>
             <a:picLocks noChangeAspect="1"/>
           </p:cNvPicPr>
@@ -3759,7 +3638,7 @@
         </p:blipFill>
         <p:spPr>
           <a:xfrm>
-            <a:off x="1328623" y="2471623"/>
+            <a:off x="3599307" y="2471623"/>
             <a:ext cx="451714" cy="451714"/>
           </a:xfrm>
           <a:prstGeom prst="rect">
@@ -3769,13 +3648,13 @@
       </p:pic>
       <p:sp>
         <p:nvSpPr>
-          <p:cNvPr id="22" name="Text 15"/>
-          <p:cNvSpPr/>
-          <p:nvPr/>
-        </p:nvSpPr>
-        <p:spPr>
-          <a:xfrm>
-            <a:off x="365760" y="3246120"/>
+          <p:cNvPr id="18" name="Text 12"/>
+          <p:cNvSpPr/>
+          <p:nvPr/>
+        </p:nvSpPr>
+        <p:spPr>
+          <a:xfrm>
+            <a:off x="2636444" y="3246120"/>
             <a:ext cx="2377440" cy="457200"/>
           </a:xfrm>
           <a:prstGeom prst="rect">
@@ -3808,6 +3687,128 @@
       </p:sp>
       <p:sp>
         <p:nvSpPr>
+          <p:cNvPr id="19" name="Text 13"/>
+          <p:cNvSpPr/>
+          <p:nvPr/>
+        </p:nvSpPr>
+        <p:spPr>
+          <a:xfrm>
+            <a:off x="2468880" y="2468880"/>
+            <a:ext cx="441884" cy="548640"/>
+          </a:xfrm>
+          <a:prstGeom prst="rect">
+            <a:avLst/>
+          </a:prstGeom>
+          <a:noFill/>
+          <a:ln/>
+        </p:spPr>
+        <p:txBody>
+          <a:bodyPr wrap="square" lIns="0" tIns="0" rIns="0" bIns="0" rtlCol="0" anchor="ctr"/>
+          <a:lstStyle/>
+          <a:p>
+            <a:pPr algn="ctr" indent="0" marL="0">
+              <a:buNone/>
+            </a:pPr>
+            <a:r>
+              <a:rPr lang="en-US" sz="2200" dirty="0">
+                <a:solidFill>
+                  <a:srgbClr val="E4DDCB"/>
+                </a:solidFill>
+                <a:latin typeface="Arial" pitchFamily="34" charset="0"/>
+                <a:ea typeface="Arial" pitchFamily="34" charset="-122"/>
+                <a:cs typeface="Arial" pitchFamily="34" charset="-120"/>
+              </a:rPr>
+              <a:t>/</a:t>
+            </a:r>
+            <a:endParaRPr lang="en-US" sz="2200" dirty="0"/>
+          </a:p>
+        </p:txBody>
+      </p:sp>
+      <p:sp>
+        <p:nvSpPr>
+          <p:cNvPr id="20" name="Shape 14"/>
+          <p:cNvSpPr/>
+          <p:nvPr/>
+        </p:nvSpPr>
+        <p:spPr>
+          <a:xfrm>
+            <a:off x="1120140" y="2263140"/>
+            <a:ext cx="868680" cy="868680"/>
+          </a:xfrm>
+          <a:prstGeom prst="ellipse">
+            <a:avLst/>
+          </a:prstGeom>
+          <a:solidFill>
+            <a:srgbClr val="9C7B34"/>
+          </a:solidFill>
+          <a:ln/>
+        </p:spPr>
+      </p:sp>
+      <p:pic>
+        <p:nvPicPr>
+          <p:cNvPr id="21" name="Image 4" descr="/tmp/claude-0/-home-user-Ein-Prat-work/bfe443db-e493-5438-add8-ac2e37bc83f4/scratchpad/pptx-build/icons/xCircle.png">    </p:cNvPr>
+          <p:cNvPicPr>
+            <a:picLocks noChangeAspect="1"/>
+          </p:cNvPicPr>
+          <p:nvPr/>
+        </p:nvPicPr>
+        <p:blipFill>
+          <a:blip r:embed="rId3"/>
+          <a:stretch>
+            <a:fillRect/>
+          </a:stretch>
+        </p:blipFill>
+        <p:spPr>
+          <a:xfrm>
+            <a:off x="1328623" y="2471623"/>
+            <a:ext cx="451714" cy="451714"/>
+          </a:xfrm>
+          <a:prstGeom prst="rect">
+            <a:avLst/>
+          </a:prstGeom>
+        </p:spPr>
+      </p:pic>
+      <p:sp>
+        <p:nvSpPr>
+          <p:cNvPr id="22" name="Text 15"/>
+          <p:cNvSpPr/>
+          <p:nvPr/>
+        </p:nvSpPr>
+        <p:spPr>
+          <a:xfrm>
+            <a:off x="365760" y="3246120"/>
+            <a:ext cx="2377440" cy="457200"/>
+          </a:xfrm>
+          <a:prstGeom prst="rect">
+            <a:avLst/>
+          </a:prstGeom>
+          <a:noFill/>
+          <a:ln/>
+        </p:spPr>
+        <p:txBody>
+          <a:bodyPr wrap="square" lIns="0" tIns="0" rIns="0" bIns="0" rtlCol="0" anchor="ctr"/>
+          <a:lstStyle/>
+          <a:p>
+            <a:pPr algn="ctr" indent="0" marL="0">
+              <a:buNone/>
+            </a:pPr>
+            <a:r>
+              <a:rPr lang="en-US" sz="1400" b="1" dirty="0">
+                <a:solidFill>
+                  <a:srgbClr val="3E3426"/>
+                </a:solidFill>
+                <a:latin typeface="Arial" pitchFamily="34" charset="0"/>
+                <a:ea typeface="Arial" pitchFamily="34" charset="-122"/>
+                <a:cs typeface="Arial" pitchFamily="34" charset="-120"/>
+              </a:rPr>
+              <a:t>בתנאי</a:t>
+            </a:r>
+            <a:endParaRPr lang="en-US" sz="1400" dirty="0"/>
+          </a:p>
+        </p:txBody>
+      </p:sp>
+      <p:sp>
+        <p:nvSpPr>
           <p:cNvPr id="23" name="Shape 16"/>
           <p:cNvSpPr/>
           <p:nvPr/>
@@ -3910,7 +3911,7 @@
                 <a:ea typeface="Arial" pitchFamily="34" charset="-122"/>
                 <a:cs typeface="Arial" pitchFamily="34" charset="-120"/>
               </a:rPr>
-              <a:t>המאגר המשותף — קובץ אחד לכל הצוותים
+              <a:t>מאגר המרצים — מסך אחד לכל הצוותים, באפליקציה
 </a:t>
             </a:r>
             <a:endParaRPr lang="en-US" sz="1600" dirty="0"/>
@@ -3928,7 +3929,7 @@
                 <a:ea typeface="Arial" pitchFamily="34" charset="-122"/>
                 <a:cs typeface="Arial" pitchFamily="34" charset="-120"/>
               </a:rPr>
-              <a:t>המטרה היא לעזור לכולם להישאר מסודרים: לשתף מידע אחד עם השני, ולמנוע כפילויות וטעויות. כל פנייה למרצה — גם סירוב — נרשמת שם, כדי שכל צוות ידע מה כבר קרה לפני שהוא פונה בעצמו.</a:t>
+              <a:t>כל פנייה — גם סירוב — נרשמת שם עם המשמר שפנה, ואם צוות אחר כבר פנה לאדם, האפליקציה מזהירה לפני שפונים שוב. ולידו «חיפוש מרצים»: סורק את הרשת ומציע שמות לאימות — לעולם לא פרטי קשר; אותם מוצאים דרך העמוד המוסדי.</a:t>
             </a:r>
             <a:endParaRPr lang="en-US" sz="1600" dirty="0"/>
           </a:p>
@@ -4006,7 +4007,7 @@
                 <a:ea typeface="Arial" pitchFamily="34" charset="-122"/>
                 <a:cs typeface="Arial" pitchFamily="34" charset="-120"/>
               </a:rPr>
-              <a:t>11</a:t>
+              <a:t>12</a:t>
             </a:r>
             <a:endParaRPr lang="en-US" sz="1000" dirty="0"/>
           </a:p>
@@ -4761,7 +4762,7 @@
                 <a:ea typeface="Arial" pitchFamily="34" charset="-122"/>
                 <a:cs typeface="Arial" pitchFamily="34" charset="-120"/>
               </a:rPr>
-              <a:t>12</a:t>
+              <a:t>13</a:t>
             </a:r>
             <a:endParaRPr lang="en-US" sz="1000" dirty="0"/>
           </a:p>
@@ -5327,7 +5328,7 @@
                 <a:ea typeface="Arial" pitchFamily="34" charset="-122"/>
                 <a:cs typeface="Arial" pitchFamily="34" charset="-120"/>
               </a:rPr>
-              <a:t>13</a:t>
+              <a:t>14</a:t>
             </a:r>
             <a:endParaRPr lang="en-US" sz="1000" dirty="0"/>
           </a:p>
@@ -6108,7 +6109,7 @@
                 <a:ea typeface="Arial" pitchFamily="34" charset="-122"/>
                 <a:cs typeface="Arial" pitchFamily="34" charset="-120"/>
               </a:rPr>
-              <a:t>זו המלצה שמבוססת על קצב סביר, לא כלל נוקשה. תתאימו לפי מה שעובד לכם.</a:t>
+              <a:t>האפליקציה מחשבת לכל משימה תאריך מומלץ מתאריך המשמר — שלושה שבועות לנושא, שבועיים למרצים, שבוע ללוגיסטיקה — ומסמנת בעדינות מה עבר. המלצה, לא חוק.</a:t>
             </a:r>
             <a:endParaRPr lang="en-US" sz="1400" dirty="0"/>
           </a:p>
@@ -6186,7 +6187,7 @@
                 <a:ea typeface="Arial" pitchFamily="34" charset="-122"/>
                 <a:cs typeface="Arial" pitchFamily="34" charset="-120"/>
               </a:rPr>
-              <a:t>14</a:t>
+              <a:t>15</a:t>
             </a:r>
             <a:endParaRPr lang="en-US" sz="1000" dirty="0"/>
           </a:p>
@@ -6480,7 +6481,7 @@
                 <a:ea typeface="Arial" pitchFamily="34" charset="-122"/>
                 <a:cs typeface="Arial" pitchFamily="34" charset="-120"/>
               </a:rPr>
-              <a:t>15</a:t>
+              <a:t>16</a:t>
             </a:r>
             <a:endParaRPr lang="en-US" sz="1000" dirty="0"/>
           </a:p>
@@ -6634,7 +6635,7 @@
                 <a:ea typeface="Arial" pitchFamily="34" charset="-122"/>
                 <a:cs typeface="Arial" pitchFamily="34" charset="-120"/>
               </a:rPr>
-              <a:t>שאלות בדרך? פנו לצוות בכל שלב.</a:t>
+              <a:t>שאלות בדרך? פנו לצוות בכל שלב — וכל מה שנסגר, נסגר באפליקציה.</a:t>
             </a:r>
             <a:endParaRPr lang="en-US" sz="1600" dirty="0"/>
           </a:p>
@@ -6676,6 +6677,432 @@
               <a:t>מדרשת עין פרת — האקדמיה למנהיגות חברתית</a:t>
             </a:r>
             <a:endParaRPr lang="en-US" sz="1200" dirty="0"/>
+          </a:p>
+        </p:txBody>
+      </p:sp>
+    </p:spTree>
+  </p:cSld>
+  <p:clrMapOvr>
+    <a:masterClrMapping/>
+  </p:clrMapOvr>
+</p:sld>
+</file>
+
+<file path=ppt/slides/slide17.xml><?xml version="1.0" encoding="utf-8"?>
+<p:sld xmlns:a="http://schemas.openxmlformats.org/drawingml/2006/main" xmlns:r="http://schemas.openxmlformats.org/officeDocument/2006/relationships" xmlns:p="http://schemas.openxmlformats.org/presentationml/2006/main">
+  <p:cSld name="Slide 10">
+    <p:bg>
+      <p:bgPr>
+        <a:solidFill>
+          <a:srgbClr val="FFFFFF"/>
+        </a:solidFill>
+      </p:bgPr>
+    </p:bg>
+    <p:spTree>
+      <p:nvGrpSpPr>
+        <p:cNvPr id="1" name=""/>
+        <p:cNvGrpSpPr/>
+        <p:nvPr/>
+      </p:nvGrpSpPr>
+      <p:grpSpPr>
+        <a:xfrm>
+          <a:off x="0" y="0"/>
+          <a:ext cx="0" cy="0"/>
+          <a:chOff x="0" y="0"/>
+          <a:chExt cx="0" cy="0"/>
+        </a:xfrm>
+      </p:grpSpPr>
+      <p:sp>
+        <p:nvSpPr>
+          <p:cNvPr id="2" name="Text 0"/>
+          <p:cNvSpPr/>
+          <p:nvPr/>
+        </p:nvSpPr>
+        <p:spPr>
+          <a:xfrm>
+            <a:off x="640080" y="457200"/>
+            <a:ext cx="10911535" cy="320040"/>
+          </a:xfrm>
+          <a:prstGeom prst="rect">
+            <a:avLst/>
+          </a:prstGeom>
+          <a:noFill/>
+          <a:ln/>
+        </p:spPr>
+        <p:txBody>
+          <a:bodyPr wrap="square" lIns="0" tIns="0" rIns="0" bIns="0" rtlCol="0" anchor="ctr"/>
+          <a:lstStyle/>
+          <a:p>
+            <a:pPr algn="r" indent="0" marL="0">
+              <a:buNone/>
+            </a:pPr>
+            <a:r>
+              <a:rPr lang="en-US" sz="1300" b="1" spc="100" kern="0" dirty="0">
+                <a:solidFill>
+                  <a:srgbClr val="9C7B34"/>
+                </a:solidFill>
+                <a:latin typeface="Arial" pitchFamily="34" charset="0"/>
+                <a:ea typeface="Arial" pitchFamily="34" charset="-122"/>
+                <a:cs typeface="Arial" pitchFamily="34" charset="-120"/>
+              </a:rPr>
+              <a:t>האפליקציה</a:t>
+            </a:r>
+            <a:endParaRPr lang="en-US" sz="1300" dirty="0"/>
+          </a:p>
+        </p:txBody>
+      </p:sp>
+      <p:sp>
+        <p:nvSpPr>
+          <p:cNvPr id="3" name="Text 1"/>
+          <p:cNvSpPr/>
+          <p:nvPr/>
+        </p:nvSpPr>
+        <p:spPr>
+          <a:xfrm>
+            <a:off x="640080" y="749808"/>
+            <a:ext cx="10911535" cy="731520"/>
+          </a:xfrm>
+          <a:prstGeom prst="rect">
+            <a:avLst/>
+          </a:prstGeom>
+          <a:noFill/>
+          <a:ln/>
+        </p:spPr>
+        <p:txBody>
+          <a:bodyPr wrap="square" lIns="0" tIns="0" rIns="0" bIns="0" rtlCol="0" anchor="ctr"/>
+          <a:lstStyle/>
+          <a:p>
+            <a:pPr algn="r" indent="0" marL="0">
+              <a:buNone/>
+            </a:pPr>
+            <a:r>
+              <a:rPr lang="en-US" sz="3200" b="1" dirty="0">
+                <a:solidFill>
+                  <a:srgbClr val="3E3426"/>
+                </a:solidFill>
+                <a:latin typeface="Cambria" pitchFamily="34" charset="0"/>
+                <a:ea typeface="Cambria" pitchFamily="34" charset="-122"/>
+                <a:cs typeface="Cambria" pitchFamily="34" charset="-120"/>
+              </a:rPr>
+              <a:t>איך נכנסים ומה רואים</a:t>
+            </a:r>
+            <a:endParaRPr lang="en-US" sz="3200" dirty="0"/>
+          </a:p>
+        </p:txBody>
+      </p:sp>
+      <p:sp>
+        <p:nvSpPr>
+          <p:cNvPr id="301" name="Text App"/>
+          <p:cNvSpPr/>
+          <p:nvPr/>
+        </p:nvSpPr>
+        <p:spPr>
+          <a:xfrm>
+            <a:off x="6583680" y="1874519"/>
+            <a:ext cx="4965192" cy="3749039"/>
+          </a:xfrm>
+          <a:prstGeom prst="rect">
+            <a:avLst/>
+          </a:prstGeom>
+          <a:noFill/>
+          <a:ln/>
+        </p:spPr>
+        <p:txBody>
+          <a:bodyPr wrap="square" lIns="0" tIns="0" rIns="0" bIns="0" rtlCol="1" anchor="t"/>
+          <a:lstStyle/>
+          <a:p>
+            <a:pPr algn="r" rtl="1" indent="0" marL="0">
+              <a:spcAft>
+                <a:spcPts val="900"/>
+              </a:spcAft>
+              <a:buNone/>
+            </a:pPr>
+            <a:r>
+              <a:rPr lang="he-IL" sz="1500" b="1" dirty="0">
+                <a:solidFill>
+                  <a:srgbClr val="3E3426"/>
+                </a:solidFill>
+                <a:latin typeface="Arial" pitchFamily="34" charset="0"/>
+                <a:ea typeface="Arial" pitchFamily="34" charset="-122"/>
+                <a:cs typeface="Arial" pitchFamily="34" charset="-120"/>
+              </a:rPr>
+              <a:t>נכנסים עם השם המלא</a:t>
+            </a:r>
+            <a:r>
+              <a:rPr lang="he-IL" sz="1250" dirty="0">
+                <a:solidFill>
+                  <a:srgbClr val="6E6250"/>
+                </a:solidFill>
+                <a:latin typeface="Arial" pitchFamily="34" charset="0"/>
+                <a:ea typeface="Arial" pitchFamily="34" charset="-122"/>
+                <a:cs typeface="Arial" pitchFamily="34" charset="-120"/>
+              </a:rPr>
+              <a:t> — כפי שהוא מופיע בשיבוץ. בלי סיסמה, וגם מהטלפון.</a:t>
+            </a:r>
+            <a:endParaRPr lang="he-IL" sz="1250" dirty="0"/>
+          </a:p>
+          <a:p>
+            <a:pPr algn="r" rtl="1" indent="0" marL="0">
+              <a:spcAft>
+                <a:spcPts val="900"/>
+              </a:spcAft>
+              <a:buNone/>
+            </a:pPr>
+            <a:r>
+              <a:rPr lang="he-IL" sz="1500" b="1" dirty="0">
+                <a:solidFill>
+                  <a:srgbClr val="3E3426"/>
+                </a:solidFill>
+                <a:latin typeface="Arial" pitchFamily="34" charset="0"/>
+                <a:ea typeface="Arial" pitchFamily="34" charset="-122"/>
+                <a:cs typeface="Arial" pitchFamily="34" charset="-120"/>
+              </a:rPr>
+              <a:t>מסך הבית</a:t>
+            </a:r>
+            <a:r>
+              <a:rPr lang="he-IL" sz="1250" dirty="0">
+                <a:solidFill>
+                  <a:srgbClr val="6E6250"/>
+                </a:solidFill>
+                <a:latin typeface="Arial" pitchFamily="34" charset="0"/>
+                <a:ea typeface="Arial" pitchFamily="34" charset="-122"/>
+                <a:cs typeface="Arial" pitchFamily="34" charset="-120"/>
+              </a:rPr>
+              <a:t> — המשמר הבא שלכם, השלב שבו הוא עומד, ורק המשימות של השלב הזה. «פתח» מוביל למקום שבו סוגרים אותן.</a:t>
+            </a:r>
+            <a:endParaRPr lang="he-IL" sz="1250" dirty="0"/>
+          </a:p>
+          <a:p>
+            <a:pPr algn="r" rtl="1" indent="0" marL="0">
+              <a:spcAft>
+                <a:spcPts val="900"/>
+              </a:spcAft>
+              <a:buNone/>
+            </a:pPr>
+            <a:r>
+              <a:rPr lang="he-IL" sz="1500" b="1" dirty="0">
+                <a:solidFill>
+                  <a:srgbClr val="3E3426"/>
+                </a:solidFill>
+                <a:latin typeface="Arial" pitchFamily="34" charset="0"/>
+                <a:ea typeface="Arial" pitchFamily="34" charset="-122"/>
+                <a:cs typeface="Arial" pitchFamily="34" charset="-120"/>
+              </a:rPr>
+              <a:t>שאר המשמרים שלכם</a:t>
+            </a:r>
+            <a:r>
+              <a:rPr lang="he-IL" sz="1250" dirty="0">
+                <a:solidFill>
+                  <a:srgbClr val="6E6250"/>
+                </a:solidFill>
+                <a:latin typeface="Arial" pitchFamily="34" charset="0"/>
+                <a:ea typeface="Arial" pitchFamily="34" charset="-122"/>
+                <a:cs typeface="Arial" pitchFamily="34" charset="-120"/>
+              </a:rPr>
+              <a:t> — בתור, לפי תאריך. לחיצה על כרטיס פותחת את ניהול המשמר שלו.</a:t>
+            </a:r>
+            <a:endParaRPr lang="he-IL" sz="1250" dirty="0"/>
+          </a:p>
+          <a:p>
+            <a:pPr algn="r" rtl="1" indent="0" marL="0">
+              <a:buNone/>
+            </a:pPr>
+            <a:r>
+              <a:rPr lang="he-IL" sz="1500" b="1" dirty="0">
+                <a:solidFill>
+                  <a:srgbClr val="3E3426"/>
+                </a:solidFill>
+                <a:latin typeface="Arial" pitchFamily="34" charset="0"/>
+                <a:ea typeface="Arial" pitchFamily="34" charset="-122"/>
+                <a:cs typeface="Arial" pitchFamily="34" charset="-120"/>
+              </a:rPr>
+              <a:t>ארבעה מסכים</a:t>
+            </a:r>
+            <a:r>
+              <a:rPr lang="he-IL" sz="1250" dirty="0">
+                <a:solidFill>
+                  <a:srgbClr val="6E6250"/>
+                </a:solidFill>
+                <a:latin typeface="Arial" pitchFamily="34" charset="0"/>
+                <a:ea typeface="Arial" pitchFamily="34" charset="-122"/>
+                <a:cs typeface="Arial" pitchFamily="34" charset="-120"/>
+              </a:rPr>
+              <a:t> — מסך הבית · ניהול המשמר · מאגר המרצים · חיפוש מרצים.</a:t>
+            </a:r>
+            <a:endParaRPr lang="he-IL" sz="1250" dirty="0"/>
+          </a:p>
+        </p:txBody>
+      </p:sp>
+      <p:pic>
+        <p:nvPicPr>
+          <p:cNvPr id="302" name="Screenshot" descr="מסך הבית של חניך באפליקציה"/>
+          <p:cNvPicPr>
+            <a:picLocks noChangeAspect="1"/>
+          </p:cNvPicPr>
+          <p:nvPr/>
+        </p:nvPicPr>
+        <p:blipFill>
+          <a:blip r:embed="rId7"/>
+          <a:stretch>
+            <a:fillRect/>
+          </a:stretch>
+        </p:blipFill>
+        <p:spPr>
+          <a:xfrm>
+            <a:off x="640080" y="1874519"/>
+            <a:ext cx="5577840" cy="3585754"/>
+          </a:xfrm>
+          <a:prstGeom prst="rect">
+            <a:avLst/>
+          </a:prstGeom>
+          <a:ln w="9525">
+            <a:solidFill>
+              <a:srgbClr val="E4DDCB"/>
+            </a:solidFill>
+          </a:ln>
+        </p:spPr>
+      </p:pic>
+      <p:sp>
+        <p:nvSpPr>
+          <p:cNvPr id="19" name="Shape 12"/>
+          <p:cNvSpPr/>
+          <p:nvPr/>
+        </p:nvSpPr>
+        <p:spPr>
+          <a:xfrm>
+            <a:off x="640080" y="5897880"/>
+            <a:ext cx="10911535" cy="594360"/>
+          </a:xfrm>
+          <a:prstGeom prst="roundRect">
+            <a:avLst>
+              <a:gd name="adj" fmla="val 12308"/>
+            </a:avLst>
+          </a:prstGeom>
+          <a:solidFill>
+            <a:srgbClr val="F5F1E6"/>
+          </a:solidFill>
+          <a:ln w="12700">
+            <a:solidFill>
+              <a:srgbClr val="E4DDCB"/>
+            </a:solidFill>
+            <a:prstDash val="solid"/>
+          </a:ln>
+        </p:spPr>
+      </p:sp>
+      <p:sp>
+        <p:nvSpPr>
+          <p:cNvPr id="20" name="Text 13"/>
+          <p:cNvSpPr/>
+          <p:nvPr/>
+        </p:nvSpPr>
+        <p:spPr>
+          <a:xfrm>
+            <a:off x="822960" y="5897880"/>
+            <a:ext cx="10545775" cy="594360"/>
+          </a:xfrm>
+          <a:prstGeom prst="rect">
+            <a:avLst/>
+          </a:prstGeom>
+          <a:noFill/>
+          <a:ln/>
+        </p:spPr>
+        <p:txBody>
+          <a:bodyPr wrap="square" lIns="0" tIns="0" rIns="0" bIns="0" rtlCol="0" anchor="ctr"/>
+          <a:lstStyle/>
+          <a:p>
+            <a:pPr algn="ctr" indent="0" marL="0">
+              <a:buNone/>
+            </a:pPr>
+            <a:r>
+              <a:rPr lang="en-US" sz="1400" i="1" dirty="0">
+                <a:solidFill>
+                  <a:srgbClr val="6E6250"/>
+                </a:solidFill>
+                <a:latin typeface="Arial" pitchFamily="34" charset="0"/>
+                <a:ea typeface="Arial" pitchFamily="34" charset="-122"/>
+                <a:cs typeface="Arial" pitchFamily="34" charset="-120"/>
+              </a:rPr>
+              <a:t>עובד גם מהטלפון. כל מה שנסגר — נסגר שם, ופעם אחת.</a:t>
+            </a:r>
+            <a:endParaRPr lang="en-US" sz="1400" dirty="0"/>
+          </a:p>
+        </p:txBody>
+      </p:sp>
+      <p:sp>
+        <p:nvSpPr>
+          <p:cNvPr id="21" name="Text 14"/>
+          <p:cNvSpPr/>
+          <p:nvPr/>
+        </p:nvSpPr>
+        <p:spPr>
+          <a:xfrm>
+            <a:off x="640080" y="6400800"/>
+            <a:ext cx="4572000" cy="320040"/>
+          </a:xfrm>
+          <a:prstGeom prst="rect">
+            <a:avLst/>
+          </a:prstGeom>
+          <a:noFill/>
+          <a:ln/>
+        </p:spPr>
+        <p:txBody>
+          <a:bodyPr wrap="square" lIns="0" tIns="0" rIns="0" bIns="0" rtlCol="0" anchor="ctr"/>
+          <a:lstStyle/>
+          <a:p>
+            <a:pPr algn="l" indent="0" marL="0">
+              <a:buNone/>
+            </a:pPr>
+            <a:r>
+              <a:rPr lang="en-US" sz="1000" dirty="0">
+                <a:solidFill>
+                  <a:srgbClr val="6E6250"/>
+                </a:solidFill>
+                <a:latin typeface="Arial" pitchFamily="34" charset="0"/>
+                <a:ea typeface="Arial" pitchFamily="34" charset="-122"/>
+                <a:cs typeface="Arial" pitchFamily="34" charset="-120"/>
+              </a:rPr>
+              <a:t>בניית משמר · תשפ״ז</a:t>
+            </a:r>
+            <a:endParaRPr lang="en-US" sz="1000" dirty="0"/>
+          </a:p>
+        </p:txBody>
+      </p:sp>
+      <p:sp>
+        <p:nvSpPr>
+          <p:cNvPr id="22" name="Text 15"/>
+          <p:cNvSpPr/>
+          <p:nvPr/>
+        </p:nvSpPr>
+        <p:spPr>
+          <a:xfrm>
+            <a:off x="10637215" y="6400800"/>
+            <a:ext cx="914400" cy="320040"/>
+          </a:xfrm>
+          <a:prstGeom prst="rect">
+            <a:avLst/>
+          </a:prstGeom>
+          <a:noFill/>
+          <a:ln/>
+        </p:spPr>
+        <p:txBody>
+          <a:bodyPr wrap="square" lIns="0" tIns="0" rIns="0" bIns="0" rtlCol="0" anchor="ctr"/>
+          <a:lstStyle/>
+          <a:p>
+            <a:pPr algn="r" indent="0" marL="0">
+              <a:buNone/>
+            </a:pPr>
+            <a:r>
+              <a:rPr lang="en-US" sz="1000" dirty="0">
+                <a:solidFill>
+                  <a:srgbClr val="6E6250"/>
+                </a:solidFill>
+                <a:latin typeface="Arial" pitchFamily="34" charset="0"/>
+                <a:ea typeface="Arial" pitchFamily="34" charset="-122"/>
+                <a:cs typeface="Arial" pitchFamily="34" charset="-120"/>
+              </a:rPr>
+              <a:t>11</a:t>
+            </a:r>
+            <a:endParaRPr lang="en-US" sz="1000" dirty="0"/>
           </a:p>
         </p:txBody>
       </p:sp>
@@ -7198,7 +7625,7 @@
                 <a:ea typeface="Arial" pitchFamily="34" charset="-122"/>
                 <a:cs typeface="Arial" pitchFamily="34" charset="-120"/>
               </a:rPr>
-              <a:t>קובץ העבודה — איך מתעדים הכל</a:t>
+              <a:t>האפליקציה — הבית של כל משמר</a:t>
             </a:r>
             <a:endParaRPr lang="en-US" sz="1700" dirty="0"/>
           </a:p>
@@ -11514,7 +11941,7 @@
                 <a:ea typeface="Arial" pitchFamily="34" charset="-122"/>
                 <a:cs typeface="Arial" pitchFamily="34" charset="-120"/>
               </a:rPr>
-              <a:t>כמה מקטעים, אילו הפסקות, מתי חבורות</a:t>
+              <a:t>השלד נבנה לבד כשסוגרים נושא; משנים משך — והשעות זזות</a:t>
             </a:r>
             <a:endParaRPr lang="en-US" sz="1500" dirty="0"/>
           </a:p>
@@ -11653,7 +12080,7 @@
                 <a:ea typeface="Arial" pitchFamily="34" charset="-122"/>
                 <a:cs typeface="Arial" pitchFamily="34" charset="-120"/>
               </a:rPr>
-              <a:t>בודקים במאגר המשותף, פונים, סוגרים</a:t>
+              <a:t>במאגר המשותף ובסריקת הרשת; פונים וסוגרים — הכל באפליקציה</a:t>
             </a:r>
             <a:endParaRPr lang="en-US" sz="1500" dirty="0"/>
           </a:p>
@@ -12070,7 +12497,7 @@
                 <a:ea typeface="Arial" pitchFamily="34" charset="-122"/>
                 <a:cs typeface="Arial" pitchFamily="34" charset="-120"/>
               </a:rPr>
-              <a:t>פרומפט + תמונה, או רקע קיים</a:t>
+              <a:t>פרומפט + תמונה, או רקע קיים — ומעלים את התמונה לאפליקציה</a:t>
             </a:r>
             <a:endParaRPr lang="en-US" sz="1500" dirty="0"/>
           </a:p>
@@ -12209,7 +12636,7 @@
                 <a:ea typeface="Arial" pitchFamily="34" charset="-122"/>
                 <a:cs typeface="Arial" pitchFamily="34" charset="-120"/>
               </a:rPr>
-              <a:t>ואז — סיכום ולקחים לשנה הבאה</a:t>
+              <a:t>ואז — משוב באפליקציה, והוא סוגר את המשימה</a:t>
             </a:r>
             <a:endParaRPr lang="en-US" sz="1500" dirty="0"/>
           </a:p>
@@ -13210,7 +13637,7 @@
                           <a:ea typeface="Arial" pitchFamily="34" charset="-122"/>
                           <a:cs typeface="Arial" pitchFamily="34" charset="-120"/>
                         </a:rPr>
-                        <a:t>אחראים (placeholder)</a:t>
+                        <a:t>אחראים</a:t>
                       </a:r>
                       <a:endParaRPr lang="en-US" sz="1200" dirty="0">
                         <a:latin typeface="Arial" charset="0"/>
@@ -14401,7 +14828,7 @@
                           <a:ea typeface="Arial" pitchFamily="34" charset="-122"/>
                           <a:cs typeface="Arial" pitchFamily="34" charset="-120"/>
                         </a:rPr>
-                        <a:t>חניך 2 + חניך 3</a:t>
+                        <a:t>יותם ספיר + רותם דרור</a:t>
                       </a:r>
                       <a:endParaRPr lang="en-US" sz="1150" dirty="0">
                         <a:latin typeface="Arial" charset="0"/>
@@ -14793,7 +15220,7 @@
                           <a:ea typeface="Arial" pitchFamily="34" charset="-122"/>
                           <a:cs typeface="Arial" pitchFamily="34" charset="-120"/>
                         </a:rPr>
-                        <a:t>חניך 9 + חניך 5</a:t>
+                        <a:t>אלה מאיר + איתי בן יהודה</a:t>
                       </a:r>
                       <a:endParaRPr lang="en-US" sz="1150" dirty="0">
                         <a:latin typeface="Arial" charset="0"/>
@@ -15185,7 +15612,7 @@
                           <a:ea typeface="Arial" pitchFamily="34" charset="-122"/>
                           <a:cs typeface="Arial" pitchFamily="34" charset="-120"/>
                         </a:rPr>
-                        <a:t>חניך 1 + חניך 7</a:t>
+                        <a:t>זואה כהן + יעל שם טוב</a:t>
                       </a:r>
                       <a:endParaRPr lang="en-US" sz="1150" dirty="0">
                         <a:latin typeface="Arial" charset="0"/>
@@ -15577,7 +16004,7 @@
                           <a:ea typeface="Arial" pitchFamily="34" charset="-122"/>
                           <a:cs typeface="Arial" pitchFamily="34" charset="-120"/>
                         </a:rPr>
-                        <a:t>חניך 10 + חניך 4</a:t>
+                        <a:t>איתי בן מנחם + רותם דרור</a:t>
                       </a:r>
                       <a:endParaRPr lang="en-US" sz="1150" dirty="0">
                         <a:latin typeface="Arial" charset="0"/>
@@ -15969,7 +16396,7 @@
                           <a:ea typeface="Arial" pitchFamily="34" charset="-122"/>
                           <a:cs typeface="Arial" pitchFamily="34" charset="-120"/>
                         </a:rPr>
-                        <a:t>חניך 8 + חניך 6</a:t>
+                        <a:t>רוני פרנקל + יותם ספיר</a:t>
                       </a:r>
                       <a:endParaRPr lang="en-US" sz="1150" dirty="0">
                         <a:latin typeface="Arial" charset="0"/>
@@ -16361,7 +16788,7 @@
                           <a:ea typeface="Arial" pitchFamily="34" charset="-122"/>
                           <a:cs typeface="Arial" pitchFamily="34" charset="-120"/>
                         </a:rPr>
-                        <a:t>חניך 9 + חניך 3</a:t>
+                        <a:t>אלה מאיר + כליל בלאוקופף</a:t>
                       </a:r>
                       <a:endParaRPr lang="en-US" sz="1150" dirty="0">
                         <a:latin typeface="Arial" charset="0"/>
@@ -16753,7 +17180,7 @@
                           <a:ea typeface="Arial" pitchFamily="34" charset="-122"/>
                           <a:cs typeface="Arial" pitchFamily="34" charset="-120"/>
                         </a:rPr>
-                        <a:t>חניך 10 + חניך 2</a:t>
+                        <a:t>זואה כהן + יותם ספיר</a:t>
                       </a:r>
                       <a:endParaRPr lang="en-US" sz="1150" dirty="0">
                         <a:latin typeface="Arial" charset="0"/>
@@ -17145,7 +17572,7 @@
                           <a:ea typeface="Arial" pitchFamily="34" charset="-122"/>
                           <a:cs typeface="Arial" pitchFamily="34" charset="-120"/>
                         </a:rPr>
-                        <a:t>חניך 8 + חניך 4</a:t>
+                        <a:t>רותם דרור + כליל בלאוקופף</a:t>
                       </a:r>
                       <a:endParaRPr lang="en-US" sz="1150" dirty="0">
                         <a:latin typeface="Arial" charset="0"/>
@@ -17537,7 +17964,7 @@
                           <a:ea typeface="Arial" pitchFamily="34" charset="-122"/>
                           <a:cs typeface="Arial" pitchFamily="34" charset="-120"/>
                         </a:rPr>
-                        <a:t>חניך 1 + חניך 6</a:t>
+                        <a:t>איתי בן יהודה + יעל שם טוב</a:t>
                       </a:r>
                       <a:endParaRPr lang="en-US" sz="1150" dirty="0">
                         <a:latin typeface="Arial" charset="0"/>
@@ -18154,7 +18581,7 @@
                           <a:ea typeface="Arial" pitchFamily="34" charset="-122"/>
                           <a:cs typeface="Arial" pitchFamily="34" charset="-120"/>
                         </a:rPr>
-                        <a:t>אחראים (placeholder)</a:t>
+                        <a:t>אחראים</a:t>
                       </a:r>
                       <a:endParaRPr lang="en-US" sz="1200" dirty="0">
                         <a:latin typeface="Arial" charset="0"/>
@@ -18561,7 +18988,7 @@
                           <a:ea typeface="Arial" pitchFamily="34" charset="-122"/>
                           <a:cs typeface="Arial" pitchFamily="34" charset="-120"/>
                         </a:rPr>
-                        <a:t>חניך 7 + חניך 5</a:t>
+                        <a:t>רוני פרנקל + איתי בן מנחם</a:t>
                       </a:r>
                       <a:endParaRPr lang="en-US" sz="1150" dirty="0">
                         <a:latin typeface="Arial" charset="0"/>
@@ -18953,7 +19380,7 @@
                           <a:ea typeface="Arial" pitchFamily="34" charset="-122"/>
                           <a:cs typeface="Arial" pitchFamily="34" charset="-120"/>
                         </a:rPr>
-                        <a:t>חניך 8 + חניך 2</a:t>
+                        <a:t>זואה כהן + כליל בלאוקופף</a:t>
                       </a:r>
                       <a:endParaRPr lang="en-US" sz="1150" dirty="0">
                         <a:latin typeface="Arial" charset="0"/>
@@ -19345,7 +19772,7 @@
                           <a:ea typeface="Arial" pitchFamily="34" charset="-122"/>
                           <a:cs typeface="Arial" pitchFamily="34" charset="-120"/>
                         </a:rPr>
-                        <a:t>חניך 9 + חניך 10</a:t>
+                        <a:t>רוני פרנקל + איתי בן יהודה</a:t>
                       </a:r>
                       <a:endParaRPr lang="en-US" sz="1150" dirty="0">
                         <a:latin typeface="Arial" charset="0"/>
@@ -19737,7 +20164,7 @@
                           <a:ea typeface="Arial" pitchFamily="34" charset="-122"/>
                           <a:cs typeface="Arial" pitchFamily="34" charset="-120"/>
                         </a:rPr>
-                        <a:t>חניך 1 + חניך 5</a:t>
+                        <a:t>איתי בן מנחם + יעל שם טוב</a:t>
                       </a:r>
                       <a:endParaRPr lang="en-US" sz="1150" dirty="0">
                         <a:latin typeface="Arial" charset="0"/>
@@ -20129,7 +20556,7 @@
                           <a:ea typeface="Arial" pitchFamily="34" charset="-122"/>
                           <a:cs typeface="Arial" pitchFamily="34" charset="-120"/>
                         </a:rPr>
-                        <a:t>חניך 6 + חניך 4</a:t>
+                        <a:t>אלה מאיר + יותם ספיר</a:t>
                       </a:r>
                       <a:endParaRPr lang="en-US" sz="1150" dirty="0">
                         <a:latin typeface="Arial" charset="0"/>
@@ -20521,7 +20948,7 @@
                           <a:ea typeface="Arial" pitchFamily="34" charset="-122"/>
                           <a:cs typeface="Arial" pitchFamily="34" charset="-120"/>
                         </a:rPr>
-                        <a:t>חניך 7 + חניך 3</a:t>
+                        <a:t>זואה כהן + רותם דרור</a:t>
                       </a:r>
                       <a:endParaRPr lang="en-US" sz="1150" dirty="0">
                         <a:latin typeface="Arial" charset="0"/>
@@ -20913,7 +21340,7 @@
                           <a:ea typeface="Arial" pitchFamily="34" charset="-122"/>
                           <a:cs typeface="Arial" pitchFamily="34" charset="-120"/>
                         </a:rPr>
-                        <a:t>חניך 2 + חניך 9</a:t>
+                        <a:t>אלה מאיר + איתי בן מנחם</a:t>
                       </a:r>
                       <a:endParaRPr lang="en-US" sz="1150" dirty="0">
                         <a:latin typeface="Arial" charset="0"/>
@@ -21305,7 +21732,7 @@
                           <a:ea typeface="Arial" pitchFamily="34" charset="-122"/>
                           <a:cs typeface="Arial" pitchFamily="34" charset="-120"/>
                         </a:rPr>
-                        <a:t>חניך 1 + חניך 10</a:t>
+                        <a:t>יעל שם טוב + כליל בלאוקופף</a:t>
                       </a:r>
                       <a:endParaRPr lang="en-US" sz="1150" dirty="0">
                         <a:latin typeface="Arial" charset="0"/>
@@ -21697,7 +22124,7 @@
                           <a:ea typeface="Arial" pitchFamily="34" charset="-122"/>
                           <a:cs typeface="Arial" pitchFamily="34" charset="-120"/>
                         </a:rPr>
-                        <a:t>חניך 3 + חניך 8</a:t>
+                        <a:t>רוני פרנקל + רותם דרור</a:t>
                       </a:r>
                       <a:endParaRPr lang="en-US" sz="1150" dirty="0">
                         <a:latin typeface="Arial" charset="0"/>
@@ -22089,7 +22516,7 @@
                           <a:ea typeface="Arial" pitchFamily="34" charset="-122"/>
                           <a:cs typeface="Arial" pitchFamily="34" charset="-120"/>
                         </a:rPr>
-                        <a:t>חניך 5 + חניך 6</a:t>
+                        <a:t>איתי בן יהודה + יותם ספיר</a:t>
                       </a:r>
                       <a:endParaRPr lang="en-US" sz="1150" dirty="0">
                         <a:latin typeface="Arial" charset="0"/>

--- a/Mishmer-section/2026-27/binyat-mishmar-mifgash-peticha.pptx
+++ b/Mishmer-section/2026-27/binyat-mishmar-mifgash-peticha.pptx
@@ -15220,7 +15220,7 @@
                           <a:ea typeface="Arial" pitchFamily="34" charset="-122"/>
                           <a:cs typeface="Arial" pitchFamily="34" charset="-120"/>
                         </a:rPr>
-                        <a:t>אלה מאיר + איתי בן יהודה</a:t>
+                        <a:t>זואה כהן + כליל בלאוקופף</a:t>
                       </a:r>
                       <a:endParaRPr lang="en-US" sz="1150" dirty="0">
                         <a:latin typeface="Arial" charset="0"/>
@@ -15612,7 +15612,7 @@
                           <a:ea typeface="Arial" pitchFamily="34" charset="-122"/>
                           <a:cs typeface="Arial" pitchFamily="34" charset="-120"/>
                         </a:rPr>
-                        <a:t>זואה כהן + יעל שם טוב</a:t>
+                        <a:t>אלה מאיר + יעל שם טוב</a:t>
                       </a:r>
                       <a:endParaRPr lang="en-US" sz="1150" dirty="0">
                         <a:latin typeface="Arial" charset="0"/>
@@ -16396,7 +16396,7 @@
                           <a:ea typeface="Arial" pitchFamily="34" charset="-122"/>
                           <a:cs typeface="Arial" pitchFamily="34" charset="-120"/>
                         </a:rPr>
-                        <a:t>רוני פרנקל + יותם ספיר</a:t>
+                        <a:t>יותם ספיר + רוני פרנקל</a:t>
                       </a:r>
                       <a:endParaRPr lang="en-US" sz="1150" dirty="0">
                         <a:latin typeface="Arial" charset="0"/>
@@ -17180,7 +17180,7 @@
                           <a:ea typeface="Arial" pitchFamily="34" charset="-122"/>
                           <a:cs typeface="Arial" pitchFamily="34" charset="-120"/>
                         </a:rPr>
-                        <a:t>זואה כהן + יותם ספיר</a:t>
+                        <a:t>איתי בן מנחם + זואה כהן</a:t>
                       </a:r>
                       <a:endParaRPr lang="en-US" sz="1150" dirty="0">
                         <a:latin typeface="Arial" charset="0"/>
@@ -17572,7 +17572,7 @@
                           <a:ea typeface="Arial" pitchFamily="34" charset="-122"/>
                           <a:cs typeface="Arial" pitchFamily="34" charset="-120"/>
                         </a:rPr>
-                        <a:t>רותם דרור + כליל בלאוקופף</a:t>
+                        <a:t>רוני פרנקל + רותם דרור</a:t>
                       </a:r>
                       <a:endParaRPr lang="en-US" sz="1150" dirty="0">
                         <a:latin typeface="Arial" charset="0"/>
@@ -17964,7 +17964,7 @@
                           <a:ea typeface="Arial" pitchFamily="34" charset="-122"/>
                           <a:cs typeface="Arial" pitchFamily="34" charset="-120"/>
                         </a:rPr>
-                        <a:t>איתי בן יהודה + יעל שם טוב</a:t>
+                        <a:t>יעל שם טוב + כליל בלאוקופף</a:t>
                       </a:r>
                       <a:endParaRPr lang="en-US" sz="1150" dirty="0">
                         <a:latin typeface="Arial" charset="0"/>
@@ -18988,7 +18988,7 @@
                           <a:ea typeface="Arial" pitchFamily="34" charset="-122"/>
                           <a:cs typeface="Arial" pitchFamily="34" charset="-120"/>
                         </a:rPr>
-                        <a:t>רוני פרנקל + איתי בן מנחם</a:t>
+                        <a:t>איתי בן מנחם + יותם ספיר</a:t>
                       </a:r>
                       <a:endParaRPr lang="en-US" sz="1150" dirty="0">
                         <a:latin typeface="Arial" charset="0"/>
@@ -19380,7 +19380,7 @@
                           <a:ea typeface="Arial" pitchFamily="34" charset="-122"/>
                           <a:cs typeface="Arial" pitchFamily="34" charset="-120"/>
                         </a:rPr>
-                        <a:t>זואה כהן + כליל בלאוקופף</a:t>
+                        <a:t>אלה מאיר + זואה כהן</a:t>
                       </a:r>
                       <a:endParaRPr lang="en-US" sz="1150" dirty="0">
                         <a:latin typeface="Arial" charset="0"/>
@@ -19772,7 +19772,7 @@
                           <a:ea typeface="Arial" pitchFamily="34" charset="-122"/>
                           <a:cs typeface="Arial" pitchFamily="34" charset="-120"/>
                         </a:rPr>
-                        <a:t>רוני פרנקל + איתי בן יהודה</a:t>
+                        <a:t>כליל בלאוקופף + רוני פרנקל</a:t>
                       </a:r>
                       <a:endParaRPr lang="en-US" sz="1150" dirty="0">
                         <a:latin typeface="Arial" charset="0"/>
@@ -21340,7 +21340,7 @@
                           <a:ea typeface="Arial" pitchFamily="34" charset="-122"/>
                           <a:cs typeface="Arial" pitchFamily="34" charset="-120"/>
                         </a:rPr>
-                        <a:t>אלה מאיר + איתי בן מנחם</a:t>
+                        <a:t>איתי בן מנחם + כליל בלאוקופף</a:t>
                       </a:r>
                       <a:endParaRPr lang="en-US" sz="1150" dirty="0">
                         <a:latin typeface="Arial" charset="0"/>
@@ -21732,7 +21732,7 @@
                           <a:ea typeface="Arial" pitchFamily="34" charset="-122"/>
                           <a:cs typeface="Arial" pitchFamily="34" charset="-120"/>
                         </a:rPr>
-                        <a:t>יעל שם טוב + כליל בלאוקופף</a:t>
+                        <a:t>יעל שם טוב + רוני פרנקל</a:t>
                       </a:r>
                       <a:endParaRPr lang="en-US" sz="1150" dirty="0">
                         <a:latin typeface="Arial" charset="0"/>
@@ -22124,7 +22124,7 @@
                           <a:ea typeface="Arial" pitchFamily="34" charset="-122"/>
                           <a:cs typeface="Arial" pitchFamily="34" charset="-120"/>
                         </a:rPr>
-                        <a:t>רוני פרנקל + רותם דרור</a:t>
+                        <a:t>אלה מאיר + רותם דרור</a:t>
                       </a:r>
                       <a:endParaRPr lang="en-US" sz="1150" dirty="0">
                         <a:latin typeface="Arial" charset="0"/>
@@ -22516,7 +22516,7 @@
                           <a:ea typeface="Arial" pitchFamily="34" charset="-122"/>
                           <a:cs typeface="Arial" pitchFamily="34" charset="-120"/>
                         </a:rPr>
-                        <a:t>איתי בן יהודה + יותם ספיר</a:t>
+                        <a:t>זואה כהן + יותם ספיר</a:t>
                       </a:r>
                       <a:endParaRPr lang="en-US" sz="1150" dirty="0">
                         <a:latin typeface="Arial" charset="0"/>

--- a/Mishmer-section/2026-27/binyat-mishmar-mifgash-peticha.pptx
+++ b/Mishmer-section/2026-27/binyat-mishmar-mifgash-peticha.pptx
@@ -15612,7 +15612,7 @@
                           <a:ea typeface="Arial" pitchFamily="34" charset="-122"/>
                           <a:cs typeface="Arial" pitchFamily="34" charset="-120"/>
                         </a:rPr>
-                        <a:t>אלה מאיר + יעל שם טוב</a:t>
+                        <a:t>אלה מאיר + טליה קור</a:t>
                       </a:r>
                       <a:endParaRPr lang="en-US" sz="1150" dirty="0">
                         <a:latin typeface="Arial" charset="0"/>
@@ -17964,7 +17964,7 @@
                           <a:ea typeface="Arial" pitchFamily="34" charset="-122"/>
                           <a:cs typeface="Arial" pitchFamily="34" charset="-120"/>
                         </a:rPr>
-                        <a:t>יעל שם טוב + כליל בלאוקופף</a:t>
+                        <a:t>טליה קור + כליל בלאוקופף</a:t>
                       </a:r>
                       <a:endParaRPr lang="en-US" sz="1150" dirty="0">
                         <a:latin typeface="Arial" charset="0"/>
@@ -20164,7 +20164,7 @@
                           <a:ea typeface="Arial" pitchFamily="34" charset="-122"/>
                           <a:cs typeface="Arial" pitchFamily="34" charset="-120"/>
                         </a:rPr>
-                        <a:t>איתי בן מנחם + יעל שם טוב</a:t>
+                        <a:t>איתי בן מנחם + טליה קור</a:t>
                       </a:r>
                       <a:endParaRPr lang="en-US" sz="1150" dirty="0">
                         <a:latin typeface="Arial" charset="0"/>
@@ -21732,7 +21732,7 @@
                           <a:ea typeface="Arial" pitchFamily="34" charset="-122"/>
                           <a:cs typeface="Arial" pitchFamily="34" charset="-120"/>
                         </a:rPr>
-                        <a:t>יעל שם טוב + רוני פרנקל</a:t>
+                        <a:t>טליה קור + רוני פרנקל</a:t>
                       </a:r>
                       <a:endParaRPr lang="en-US" sz="1150" dirty="0">
                         <a:latin typeface="Arial" charset="0"/>
